--- a/methodical-materials/Презентация_методической_разработки_v3.pptx
+++ b/methodical-materials/Презентация_методической_разработки_v3.pptx
@@ -11647,7 +11647,7 @@
         </p:blipFill>
         <p:spPr>
           <a:xfrm>
-            <a:off x="0" y="0"/>
+            <a:off x="2526" y="0"/>
             <a:ext cx="12191760" cy="6857640"/>
           </a:xfrm>
           <a:prstGeom prst="rect">
@@ -13437,7 +13437,7 @@
         <p:spPr>
           <a:xfrm>
             <a:off x="638175" y="5534025"/>
-            <a:ext cx="10915650" cy="657225"/>
+            <a:ext cx="7198233" cy="657225"/>
           </a:xfrm>
           <a:prstGeom prst="roundRect">
             <a:avLst>
@@ -13640,65 +13640,81 @@
       </p:sp>
       <p:sp>
         <p:nvSpPr>
-          <p:cNvPr id="265" name="Прямоугольник 264">
-            <a:extLst>
-              <a:ext uri="{FF2B5EF4-FFF2-40B4-BE49-F238E27FC236}">
-                <a16:creationId xmlns:a16="http://schemas.microsoft.com/office/drawing/2014/main" id="{370C35D0-96CF-4016-97BE-F308CBDD8D64}"/>
-              </a:ext>
-            </a:extLst>
-          </p:cNvPr>
-          <p:cNvSpPr>
-            <a:spLocks noGrp="1"/>
-          </p:cNvSpPr>
-          <p:nvPr/>
-        </p:nvSpPr>
-        <p:spPr>
-          <a:xfrm>
-            <a:off x="7972425" y="5657850"/>
-            <a:ext cx="3286125" cy="381000"/>
+          <p:cNvPr id="3" name="TextBox 2">
+            <a:extLst>
+              <a:ext uri="{FF2B5EF4-FFF2-40B4-BE49-F238E27FC236}">
+                <a16:creationId xmlns:a16="http://schemas.microsoft.com/office/drawing/2014/main" id="{98462E64-5467-6584-EFDA-958DA817510E}"/>
+              </a:ext>
+            </a:extLst>
+          </p:cNvPr>
+          <p:cNvSpPr txBox="1"/>
+          <p:nvPr/>
+        </p:nvSpPr>
+        <p:spPr>
+          <a:xfrm>
+            <a:off x="6000750" y="6254234"/>
+            <a:ext cx="4545140" cy="369332"/>
           </a:xfrm>
           <a:prstGeom prst="rect">
             <a:avLst/>
           </a:prstGeom>
           <a:noFill/>
-          <a:ln w="0">
-            <a:noFill/>
-          </a:ln>
-        </p:spPr>
-        <p:txBody>
-          <a:bodyPr wrap="square" lIns="0" tIns="0" rIns="0" bIns="0" anchor="ctr">
-            <a:normAutofit fontScale="98039"/>
-          </a:bodyPr>
-          <a:lstStyle/>
-          <a:p>
-            <a:pPr algn="ctr">
-              <a:lnSpc>
-                <a:spcPct val="100000"/>
-              </a:lnSpc>
-              <a:buNone/>
-              <a:defRPr sz="1275" b="0">
-                <a:solidFill>
-                  <a:srgbClr val="62636A"/>
-                </a:solidFill>
-                <a:latin typeface="Arial"/>
-                <a:ea typeface="Arial"/>
-                <a:cs typeface="Arial"/>
-              </a:defRPr>
-            </a:pPr>
-            <a:r>
-              <a:rPr sz="1275" b="0">
-                <a:solidFill>
-                  <a:srgbClr val="62636A"/>
-                </a:solidFill>
-                <a:latin typeface="Arial"/>
-                <a:ea typeface="Arial"/>
-                <a:cs typeface="Arial"/>
-              </a:rPr>
-              <a:t>Без компьютеров: таблицы и данные попыток</a:t>
-            </a:r>
-          </a:p>
-        </p:txBody>
-      </p:sp>
+        </p:spPr>
+        <p:txBody>
+          <a:bodyPr wrap="square">
+            <a:spAutoFit/>
+          </a:bodyPr>
+          <a:lstStyle/>
+          <a:p>
+            <a:r>
+              <a:rPr lang="ru-RU" dirty="0">
+                <a:hlinkClick r:id="rId4"/>
+              </a:rPr>
+              <a:t>https://disk.yandex.ru/d/Ktqh0MKcq0mcdQ</a:t>
+            </a:r>
+            <a:r>
+              <a:rPr lang="ru-RU" dirty="0"/>
+              <a:t> </a:t>
+            </a:r>
+          </a:p>
+        </p:txBody>
+      </p:sp>
+      <p:pic>
+        <p:nvPicPr>
+          <p:cNvPr id="5" name="Рисунок 4">
+            <a:extLst>
+              <a:ext uri="{FF2B5EF4-FFF2-40B4-BE49-F238E27FC236}">
+                <a16:creationId xmlns:a16="http://schemas.microsoft.com/office/drawing/2014/main" id="{7CAFAC16-0DE4-1CA2-4422-F54F352D5BB7}"/>
+              </a:ext>
+            </a:extLst>
+          </p:cNvPr>
+          <p:cNvPicPr>
+            <a:picLocks noChangeAspect="1"/>
+          </p:cNvPicPr>
+          <p:nvPr/>
+        </p:nvPicPr>
+        <p:blipFill>
+          <a:blip r:embed="rId5">
+            <a:extLst>
+              <a:ext uri="{28A0092B-C50C-407E-A947-70E740481C1C}">
+                <a14:useLocalDpi xmlns:a14="http://schemas.microsoft.com/office/drawing/2010/main" val="0"/>
+              </a:ext>
+            </a:extLst>
+          </a:blip>
+          <a:stretch>
+            <a:fillRect/>
+          </a:stretch>
+        </p:blipFill>
+        <p:spPr>
+          <a:xfrm>
+            <a:off x="10525756" y="5536942"/>
+            <a:ext cx="1003816" cy="1003816"/>
+          </a:xfrm>
+          <a:prstGeom prst="rect">
+            <a:avLst/>
+          </a:prstGeom>
+        </p:spPr>
+      </p:pic>
     </p:spTree>
     <p:extLst>
       <p:ext uri="{BB962C8B-B14F-4D97-AF65-F5344CB8AC3E}">
